--- a/Documentos_organizacao/apresentacao_nb04/Apresentacao_NB04_Discretizacao_PNS2019_INTEGRADA.pptx
+++ b/Documentos_organizacao/apresentacao_nb04/Apresentacao_NB04_Discretizacao_PNS2019_INTEGRADA.pptx
@@ -16073,7 +16073,7 @@
         </p:blipFill>
         <p:spPr>
           <a:xfrm>
-            <a:off x="2984352" y="3063240"/>
+            <a:off x="2984352" y="2740512"/>
             <a:ext cx="6222990" cy="2468880"/>
           </a:xfrm>
           <a:prstGeom prst="rect">
@@ -16157,22 +16157,175 @@
               </a:spcAft>
             </a:pPr>
             <a:r>
-              <a:rPr sz="1300" b="1" i="0">
+              <a:rPr sz="1300" b="1" i="0" dirty="0" err="1">
                 <a:solidFill>
                   <a:srgbClr val="27AE60"/>
                 </a:solidFill>
                 <a:latin typeface="Calibri"/>
               </a:rPr>
-              <a:t>Exemplo real do projeto:  </a:t>
-            </a:r>
-            <a:r>
-              <a:rPr sz="1250" b="0" i="0">
+              <a:t>Exemplo</a:t>
+            </a:r>
+            <a:r>
+              <a:rPr sz="1300" b="1" i="0" dirty="0">
+                <a:solidFill>
+                  <a:srgbClr val="27AE60"/>
+                </a:solidFill>
+                <a:latin typeface="Calibri"/>
+              </a:rPr>
+              <a:t> real do </a:t>
+            </a:r>
+            <a:r>
+              <a:rPr sz="1300" b="1" i="0" dirty="0" err="1">
+                <a:solidFill>
+                  <a:srgbClr val="27AE60"/>
+                </a:solidFill>
+                <a:latin typeface="Calibri"/>
+              </a:rPr>
+              <a:t>projeto</a:t>
+            </a:r>
+            <a:r>
+              <a:rPr sz="1300" b="1" i="0" dirty="0">
+                <a:solidFill>
+                  <a:srgbClr val="27AE60"/>
+                </a:solidFill>
+                <a:latin typeface="Calibri"/>
+              </a:rPr>
+              <a:t>:  </a:t>
+            </a:r>
+            <a:r>
+              <a:rPr sz="1250" b="0" i="0" dirty="0">
                 <a:solidFill>
                   <a:srgbClr val="2B2B2B"/>
                 </a:solidFill>
                 <a:latin typeface="Calibri"/>
               </a:rPr>
-              <a:t>a idade contínua (à esquerda) torna-se 3 faixas ordinais — 60–69 · 70–79 · 80+ (à direita).</a:t>
+              <a:t>a </a:t>
+            </a:r>
+            <a:r>
+              <a:rPr sz="1250" b="0" i="0" dirty="0" err="1">
+                <a:solidFill>
+                  <a:srgbClr val="2B2B2B"/>
+                </a:solidFill>
+                <a:latin typeface="Calibri"/>
+              </a:rPr>
+              <a:t>idade</a:t>
+            </a:r>
+            <a:r>
+              <a:rPr sz="1250" b="0" i="0" dirty="0">
+                <a:solidFill>
+                  <a:srgbClr val="2B2B2B"/>
+                </a:solidFill>
+                <a:latin typeface="Calibri"/>
+              </a:rPr>
+              <a:t> </a:t>
+            </a:r>
+            <a:r>
+              <a:rPr sz="1250" b="0" i="0" dirty="0" err="1">
+                <a:solidFill>
+                  <a:srgbClr val="2B2B2B"/>
+                </a:solidFill>
+                <a:latin typeface="Calibri"/>
+              </a:rPr>
+              <a:t>contínua</a:t>
+            </a:r>
+            <a:r>
+              <a:rPr sz="1250" b="0" i="0" dirty="0">
+                <a:solidFill>
+                  <a:srgbClr val="2B2B2B"/>
+                </a:solidFill>
+                <a:latin typeface="Calibri"/>
+              </a:rPr>
+              <a:t> (à </a:t>
+            </a:r>
+            <a:r>
+              <a:rPr sz="1250" b="0" i="0" dirty="0" err="1">
+                <a:solidFill>
+                  <a:srgbClr val="2B2B2B"/>
+                </a:solidFill>
+                <a:latin typeface="Calibri"/>
+              </a:rPr>
+              <a:t>esquerda</a:t>
+            </a:r>
+            <a:r>
+              <a:rPr sz="1250" b="0" i="0" dirty="0">
+                <a:solidFill>
+                  <a:srgbClr val="2B2B2B"/>
+                </a:solidFill>
+                <a:latin typeface="Calibri"/>
+              </a:rPr>
+              <a:t>) </a:t>
+            </a:r>
+            <a:r>
+              <a:rPr sz="1250" b="0" i="0" dirty="0" err="1">
+                <a:solidFill>
+                  <a:srgbClr val="2B2B2B"/>
+                </a:solidFill>
+                <a:latin typeface="Calibri"/>
+              </a:rPr>
+              <a:t>torna</a:t>
+            </a:r>
+            <a:r>
+              <a:rPr sz="1250" b="0" i="0" dirty="0">
+                <a:solidFill>
+                  <a:srgbClr val="2B2B2B"/>
+                </a:solidFill>
+                <a:latin typeface="Calibri"/>
+              </a:rPr>
+              <a:t>-se 3 </a:t>
+            </a:r>
+            <a:r>
+              <a:rPr sz="1250" b="0" i="0" dirty="0" err="1">
+                <a:solidFill>
+                  <a:srgbClr val="2B2B2B"/>
+                </a:solidFill>
+                <a:latin typeface="Calibri"/>
+              </a:rPr>
+              <a:t>faixas</a:t>
+            </a:r>
+            <a:r>
+              <a:rPr sz="1250" b="0" i="0" dirty="0">
+                <a:solidFill>
+                  <a:srgbClr val="2B2B2B"/>
+                </a:solidFill>
+                <a:latin typeface="Calibri"/>
+              </a:rPr>
+              <a:t> </a:t>
+            </a:r>
+            <a:r>
+              <a:rPr sz="1250" b="0" i="0" dirty="0" err="1">
+                <a:solidFill>
+                  <a:srgbClr val="2B2B2B"/>
+                </a:solidFill>
+                <a:latin typeface="Calibri"/>
+              </a:rPr>
+              <a:t>ordinais</a:t>
+            </a:r>
+            <a:r>
+              <a:rPr sz="1250" b="0" i="0" dirty="0">
+                <a:solidFill>
+                  <a:srgbClr val="2B2B2B"/>
+                </a:solidFill>
+                <a:latin typeface="Calibri"/>
+              </a:rPr>
+              <a:t> — 60–69 · 70–79 · 80+ (à </a:t>
+            </a:r>
+            <a:r>
+              <a:rPr sz="1250" b="0" i="0" dirty="0" err="1">
+                <a:solidFill>
+                  <a:srgbClr val="2B2B2B"/>
+                </a:solidFill>
+                <a:latin typeface="Calibri"/>
+              </a:rPr>
+              <a:t>direita</a:t>
+            </a:r>
+            <a:r>
+              <a:rPr sz="1250" b="0" i="0" dirty="0">
+                <a:solidFill>
+                  <a:srgbClr val="2B2B2B"/>
+                </a:solidFill>
+                <a:latin typeface="Calibri"/>
+              </a:rPr>
+              <a:t>).</a:t>
             </a:r>
           </a:p>
         </p:txBody>
